--- a/public/fun/pack/pptx/talkpro/발표템플릿프리미엄_07_교육·강의_피치코퍼.pptx
+++ b/public/fun/pack/pptx/talkpro/발표템플릿프리미엄_07_교육·강의_피치코퍼.pptx
@@ -115,12 +115,12 @@
   <p:extLst>
     <p:ext uri="{521415D9-36F7-43E2-AB2F-B90AF26B5E84}">
       <p14:sectionLst xmlns:p14="http://schemas.microsoft.com/office/powerpoint/2010/main">
-        <p14:section name="시작" id="{07C56679-8A03-47AE-991D-B82CA63BFB86}">
+        <p14:section name="시작" id="{5C5A9260-7BC3-4584-8A67-F50A46447A1A}">
           <p14:sldIdLst>
             <p14:sldId id="256"/>
           </p14:sldIdLst>
         </p14:section>
-        <p14:section name="본문" id="{8E35D22F-729C-4D4A-8C8A-6DD667A0B9C8}">
+        <p14:section name="본문" id="{8FEEE26D-C519-4120-996F-1FE17E234056}">
           <p14:sldIdLst>
             <p14:sldId id="257"/>
             <p14:sldId id="258"/>
@@ -131,7 +131,7 @@
             <p14:sldId id="263"/>
           </p14:sldIdLst>
         </p14:section>
-        <p14:section name="마무리" id="{5564C825-FADA-4CDC-933A-E4BD323E5351}">
+        <p14:section name="마무리" id="{06071A48-2A8B-4BEE-9D49-8D57CD075974}">
           <p14:sldIdLst>
             <p14:sldId id="264"/>
           </p14:sldIdLst>
@@ -1932,7 +1932,7 @@
             </a:lvl1pPr>
           </a:lstStyle>
           <a:p>
-            <a:fld id="{ED5766D7-040B-4F24-9660-D68F4C889230}" type="slidenum">
+            <a:fld id="{474C1FEC-6323-4260-B170-FD68C9775E6F}" type="slidenum">
               <a:rPr lang="en-US"/>
               <a:t>‹#›</a:t>
             </a:fld>
@@ -2732,7 +2732,7 @@
             </a:lvl1pPr>
           </a:lstStyle>
           <a:p>
-            <a:fld id="{3F821445-C8BC-4B9D-8D25-C9B7D3565099}" type="slidenum">
+            <a:fld id="{59A9ABE3-5F92-4CD8-9B9E-54A04CA73296}" type="slidenum">
               <a:rPr lang="en-US"/>
               <a:t>‹#›</a:t>
             </a:fld>
@@ -3485,7 +3485,7 @@
             </a:lvl1pPr>
           </a:lstStyle>
           <a:p>
-            <a:fld id="{D5ADDBC7-659E-401A-966A-EBF11BAB63A7}" type="slidenum">
+            <a:fld id="{727F02BE-10BB-4C75-884E-A3A7375DBA7E}" type="slidenum">
               <a:rPr lang="en-US"/>
               <a:t>‹#›</a:t>
             </a:fld>
@@ -4411,7 +4411,7 @@
           <a:p>
             <a:r>
               <a:rPr lang="ko-KR"/>
-              <a:t>새 학기처럼 기초부터 차근차근 갑니다</a:t>
+              <a:t>처음 듣는 분도 기초부터 차근차근 갑니다</a:t>
             </a:r>
           </a:p>
         </p:txBody>
@@ -4439,7 +4439,7 @@
           <a:p>
             <a:r>
               <a:rPr lang="ko-KR"/>
-              <a:t>0000. 00. 00</a:t>
+              <a:t>날짜 입력</a:t>
             </a:r>
           </a:p>
         </p:txBody>
@@ -4524,7 +4524,7 @@
           <a:bodyPr/>
           <a:lstStyle/>
           <a:p>
-            <a:fld id="{82E8BAD0-D01C-4FB7-9E65-4C30FEA44D7F}" type="slidenum">
+            <a:fld id="{8610051C-EB17-42A1-BB8D-DB3DAF0D59A3}" type="slidenum">
               <a:rPr lang="en-US"/>
               <a:t>‹#›</a:t>
             </a:fld>
@@ -5698,7 +5698,7 @@
           <a:bodyPr/>
           <a:lstStyle/>
           <a:p>
-            <a:fld id="{D22E778D-0EF1-43DA-9BE9-9E859F5CDE6F}" type="slidenum">
+            <a:fld id="{6DD18E54-9835-4040-A184-CFCFA831C220}" type="slidenum">
               <a:rPr lang="en-US"/>
               <a:t>‹#›</a:t>
             </a:fld>
@@ -5786,7 +5786,7 @@
           <a:bodyPr/>
           <a:lstStyle/>
           <a:p>
-            <a:fld id="{28739BEB-5C06-46A5-A31A-6BB49BCBCB53}" type="slidenum">
+            <a:fld id="{824F6D41-47F4-4469-8CCD-710EAA3CE0B0}" type="slidenum">
               <a:rPr lang="en-US"/>
               <a:t>‹#›</a:t>
             </a:fld>
@@ -6738,7 +6738,7 @@
           <a:bodyPr/>
           <a:lstStyle/>
           <a:p>
-            <a:fld id="{5D2ED7D9-459E-4D42-B644-7B91110E7269}" type="slidenum">
+            <a:fld id="{A4142822-D249-46D6-9268-1ACDCAAB0B9D}" type="slidenum">
               <a:rPr lang="en-US"/>
               <a:t>‹#›</a:t>
             </a:fld>
@@ -7378,7 +7378,7 @@
           <a:bodyPr/>
           <a:lstStyle/>
           <a:p>
-            <a:fld id="{C536AAAB-461A-4588-937B-706C2AEA7FA0}" type="slidenum">
+            <a:fld id="{269D9215-1DFD-420D-AFED-42B1FA51B627}" type="slidenum">
               <a:rPr lang="en-US"/>
               <a:t>‹#›</a:t>
             </a:fld>
@@ -7561,7 +7561,7 @@
           <a:bodyPr/>
           <a:lstStyle/>
           <a:p>
-            <a:fld id="{6351CDB6-326A-44FB-A03E-BDD5C8325D53}" type="slidenum">
+            <a:fld id="{A6ACA61E-5658-4E70-9EB8-6DB0EB7DAFA1}" type="slidenum">
               <a:rPr lang="en-US"/>
               <a:t>‹#›</a:t>
             </a:fld>
@@ -8625,7 +8625,7 @@
           <a:bodyPr/>
           <a:lstStyle/>
           <a:p>
-            <a:fld id="{6D7B9C0F-C6C3-46BE-ACE2-07033194335C}" type="slidenum">
+            <a:fld id="{8E5F9F78-2EEB-47F1-956E-130E01A64BE4}" type="slidenum">
               <a:rPr lang="en-US"/>
               <a:t>‹#›</a:t>
             </a:fld>
